--- a/3.Linux/02.Users and Groups/Linux Users and Groups.pptx
+++ b/3.Linux/02.Users and Groups/Linux Users and Groups.pptx
@@ -213,7 +213,7 @@
           <a:p>
             <a:fld id="{2C8BCFDC-AFC7-4040-913F-11667C5AA5B6}" type="datetimeFigureOut">
               <a:rPr lang="en-US" smtClean="0"/>
-              <a:t>8/16/2021</a:t>
+              <a:t>8/23/2024</a:t>
             </a:fld>
             <a:endParaRPr lang="en-US"/>
           </a:p>
@@ -2165,7 +2165,7 @@
           <a:p>
             <a:fld id="{CA8951BB-5CCB-4817-B16C-E66A0C670350}" type="datetimeFigureOut">
               <a:rPr lang="en-US" smtClean="0"/>
-              <a:t>8/16/2021</a:t>
+              <a:t>8/23/2024</a:t>
             </a:fld>
             <a:endParaRPr lang="en-US"/>
           </a:p>
@@ -2363,7 +2363,7 @@
           <a:p>
             <a:fld id="{CA8951BB-5CCB-4817-B16C-E66A0C670350}" type="datetimeFigureOut">
               <a:rPr lang="en-US" smtClean="0"/>
-              <a:t>8/16/2021</a:t>
+              <a:t>8/23/2024</a:t>
             </a:fld>
             <a:endParaRPr lang="en-US"/>
           </a:p>
@@ -2571,7 +2571,7 @@
           <a:p>
             <a:fld id="{CA8951BB-5CCB-4817-B16C-E66A0C670350}" type="datetimeFigureOut">
               <a:rPr lang="en-US" smtClean="0"/>
-              <a:t>8/16/2021</a:t>
+              <a:t>8/23/2024</a:t>
             </a:fld>
             <a:endParaRPr lang="en-US"/>
           </a:p>
@@ -2769,7 +2769,7 @@
           <a:p>
             <a:fld id="{CA8951BB-5CCB-4817-B16C-E66A0C670350}" type="datetimeFigureOut">
               <a:rPr lang="en-US" smtClean="0"/>
-              <a:t>8/16/2021</a:t>
+              <a:t>8/23/2024</a:t>
             </a:fld>
             <a:endParaRPr lang="en-US"/>
           </a:p>
@@ -3044,7 +3044,7 @@
           <a:p>
             <a:fld id="{CA8951BB-5CCB-4817-B16C-E66A0C670350}" type="datetimeFigureOut">
               <a:rPr lang="en-US" smtClean="0"/>
-              <a:t>8/16/2021</a:t>
+              <a:t>8/23/2024</a:t>
             </a:fld>
             <a:endParaRPr lang="en-US"/>
           </a:p>
@@ -3309,7 +3309,7 @@
           <a:p>
             <a:fld id="{CA8951BB-5CCB-4817-B16C-E66A0C670350}" type="datetimeFigureOut">
               <a:rPr lang="en-US" smtClean="0"/>
-              <a:t>8/16/2021</a:t>
+              <a:t>8/23/2024</a:t>
             </a:fld>
             <a:endParaRPr lang="en-US"/>
           </a:p>
@@ -3721,7 +3721,7 @@
           <a:p>
             <a:fld id="{CA8951BB-5CCB-4817-B16C-E66A0C670350}" type="datetimeFigureOut">
               <a:rPr lang="en-US" smtClean="0"/>
-              <a:t>8/16/2021</a:t>
+              <a:t>8/23/2024</a:t>
             </a:fld>
             <a:endParaRPr lang="en-US"/>
           </a:p>
@@ -3862,7 +3862,7 @@
           <a:p>
             <a:fld id="{CA8951BB-5CCB-4817-B16C-E66A0C670350}" type="datetimeFigureOut">
               <a:rPr lang="en-US" smtClean="0"/>
-              <a:t>8/16/2021</a:t>
+              <a:t>8/23/2024</a:t>
             </a:fld>
             <a:endParaRPr lang="en-US"/>
           </a:p>
@@ -3975,7 +3975,7 @@
           <a:p>
             <a:fld id="{CA8951BB-5CCB-4817-B16C-E66A0C670350}" type="datetimeFigureOut">
               <a:rPr lang="en-US" smtClean="0"/>
-              <a:t>8/16/2021</a:t>
+              <a:t>8/23/2024</a:t>
             </a:fld>
             <a:endParaRPr lang="en-US"/>
           </a:p>
@@ -4286,7 +4286,7 @@
           <a:p>
             <a:fld id="{CA8951BB-5CCB-4817-B16C-E66A0C670350}" type="datetimeFigureOut">
               <a:rPr lang="en-US" smtClean="0"/>
-              <a:t>8/16/2021</a:t>
+              <a:t>8/23/2024</a:t>
             </a:fld>
             <a:endParaRPr lang="en-US"/>
           </a:p>
@@ -4574,7 +4574,7 @@
           <a:p>
             <a:fld id="{CA8951BB-5CCB-4817-B16C-E66A0C670350}" type="datetimeFigureOut">
               <a:rPr lang="en-US" smtClean="0"/>
-              <a:t>8/16/2021</a:t>
+              <a:t>8/23/2024</a:t>
             </a:fld>
             <a:endParaRPr lang="en-US"/>
           </a:p>
@@ -4815,7 +4815,7 @@
           <a:p>
             <a:fld id="{CA8951BB-5CCB-4817-B16C-E66A0C670350}" type="datetimeFigureOut">
               <a:rPr lang="en-US" smtClean="0"/>
-              <a:t>8/16/2021</a:t>
+              <a:t>8/23/2024</a:t>
             </a:fld>
             <a:endParaRPr lang="en-US"/>
           </a:p>
@@ -5260,31 +5260,6 @@
           </a:p>
         </p:txBody>
       </p:sp>
-      <p:sp>
-        <p:nvSpPr>
-          <p:cNvPr id="3" name="Subtitle 2">
-            <a:extLst>
-              <a:ext uri="{FF2B5EF4-FFF2-40B4-BE49-F238E27FC236}">
-                <a16:creationId xmlns:a16="http://schemas.microsoft.com/office/drawing/2014/main" id="{563BB77B-F2C9-4AC1-804E-D38F259454B8}"/>
-              </a:ext>
-            </a:extLst>
-          </p:cNvPr>
-          <p:cNvSpPr>
-            <a:spLocks noGrp="1"/>
-          </p:cNvSpPr>
-          <p:nvPr>
-            <p:ph type="subTitle" idx="1"/>
-          </p:nvPr>
-        </p:nvSpPr>
-        <p:spPr/>
-        <p:txBody>
-          <a:bodyPr/>
-          <a:lstStyle/>
-          <a:p>
-            <a:endParaRPr lang="en-US" dirty="0"/>
-          </a:p>
-        </p:txBody>
-      </p:sp>
     </p:spTree>
     <p:extLst>
       <p:ext uri="{BB962C8B-B14F-4D97-AF65-F5344CB8AC3E}">
@@ -7108,7 +7083,7 @@
             <a:pPr lvl="1"/>
             <a:r>
               <a:rPr lang="en-US" dirty="0"/>
-              <a:t>By default the user has no password, no home </a:t>
+              <a:t>By default, the user has no password, no home </a:t>
             </a:r>
             <a:r>
               <a:rPr lang="en-US" dirty="0" err="1"/>
